--- a/outputs/figures/Figure_4_Infusion_adjustment_information.pptx
+++ b/outputs/figures/Figure_4_Infusion_adjustment_information.pptx
@@ -10,7 +10,7 @@
   <p:sldIdLst>
     <p:sldId xmlns:r="http://schemas.openxmlformats.org/officeDocument/2006/relationships" id="256" r:id="Rc7efd2cc46cf4c7e"/>
   </p:sldIdLst>
-  <p:sldSz cx="5981700" cy="4762500"/>
+  <p:sldSz cx="5981700" cy="5122500"/>
   <p:notesSz cx="6858000" cy="9144000"/>
 </p:presentation>
 </file>
@@ -1072,7 +1072,7 @@
         </p:nvSpPr>
         <p:spPr>
           <a:xfrm xmlns:a="http://schemas.openxmlformats.org/drawingml/2006/main">
-            <a:off x="76200" y="38100"/>
+            <a:off x="76200" y="398100"/>
             <a:ext cx="2857500" cy="247650"/>
           </a:xfrm>
           <a:prstGeom xmlns:a="http://schemas.openxmlformats.org/drawingml/2006/main" prst="rect">
@@ -1129,7 +1129,7 @@
         </p:nvSpPr>
         <p:spPr>
           <a:xfrm xmlns:a="http://schemas.openxmlformats.org/drawingml/2006/main">
-            <a:off x="3133725" y="38100"/>
+            <a:off x="3133725" y="398100"/>
             <a:ext cx="2781300" cy="247650"/>
           </a:xfrm>
           <a:prstGeom xmlns:a="http://schemas.openxmlformats.org/drawingml/2006/main" prst="rect">
@@ -1186,7 +1186,7 @@
         </p:nvSpPr>
         <p:spPr>
           <a:xfrm xmlns:a="http://schemas.openxmlformats.org/drawingml/2006/main">
-            <a:off x="76200" y="323850"/>
+            <a:off x="76200" y="683850"/>
             <a:ext cx="2867025" cy="209550"/>
           </a:xfrm>
           <a:prstGeom xmlns:a="http://schemas.openxmlformats.org/drawingml/2006/main" prst="rect">
@@ -1243,7 +1243,7 @@
         </p:nvSpPr>
         <p:spPr>
           <a:xfrm xmlns:a="http://schemas.openxmlformats.org/drawingml/2006/main">
-            <a:off x="3133725" y="323850"/>
+            <a:off x="3133725" y="683850"/>
             <a:ext cx="2790825" cy="209550"/>
           </a:xfrm>
           <a:prstGeom xmlns:a="http://schemas.openxmlformats.org/drawingml/2006/main" prst="rect">
@@ -1300,7 +1300,7 @@
         </p:nvSpPr>
         <p:spPr>
           <a:xfrm xmlns:a="http://schemas.openxmlformats.org/drawingml/2006/main">
-            <a:off x="523875" y="3152775"/>
+            <a:off x="523875" y="3512775"/>
             <a:ext cx="2352675" cy="9525"/>
           </a:xfrm>
           <a:prstGeom xmlns:a="http://schemas.openxmlformats.org/drawingml/2006/main" prst="rect">
@@ -1330,7 +1330,7 @@
         </p:nvSpPr>
         <p:spPr>
           <a:xfrm xmlns:a="http://schemas.openxmlformats.org/drawingml/2006/main">
-            <a:off x="523875" y="990600"/>
+            <a:off x="523875" y="1350600"/>
             <a:ext cx="9525" cy="2162175"/>
           </a:xfrm>
           <a:prstGeom xmlns:a="http://schemas.openxmlformats.org/drawingml/2006/main" prst="rect">
@@ -1360,7 +1360,7 @@
         </p:nvSpPr>
         <p:spPr>
           <a:xfrm xmlns:a="http://schemas.openxmlformats.org/drawingml/2006/main">
-            <a:off x="485775" y="3152775"/>
+            <a:off x="485775" y="3512775"/>
             <a:ext cx="38100" cy="9525"/>
           </a:xfrm>
           <a:prstGeom xmlns:a="http://schemas.openxmlformats.org/drawingml/2006/main" prst="rect">
@@ -1390,7 +1390,7 @@
         </p:nvSpPr>
         <p:spPr>
           <a:xfrm xmlns:a="http://schemas.openxmlformats.org/drawingml/2006/main">
-            <a:off x="133350" y="3076575"/>
+            <a:off x="133350" y="3436575"/>
             <a:ext cx="323850" cy="180975"/>
           </a:xfrm>
           <a:prstGeom xmlns:a="http://schemas.openxmlformats.org/drawingml/2006/main" prst="rect">
@@ -1447,7 +1447,7 @@
         </p:nvSpPr>
         <p:spPr>
           <a:xfrm xmlns:a="http://schemas.openxmlformats.org/drawingml/2006/main">
-            <a:off x="485775" y="2612231"/>
+            <a:off x="485775" y="2972231"/>
             <a:ext cx="38100" cy="9525"/>
           </a:xfrm>
           <a:prstGeom xmlns:a="http://schemas.openxmlformats.org/drawingml/2006/main" prst="rect">
@@ -1477,7 +1477,7 @@
         </p:nvSpPr>
         <p:spPr>
           <a:xfrm xmlns:a="http://schemas.openxmlformats.org/drawingml/2006/main">
-            <a:off x="133350" y="2536031"/>
+            <a:off x="133350" y="2896031"/>
             <a:ext cx="323850" cy="180975"/>
           </a:xfrm>
           <a:prstGeom xmlns:a="http://schemas.openxmlformats.org/drawingml/2006/main" prst="rect">
@@ -1534,7 +1534,7 @@
         </p:nvSpPr>
         <p:spPr>
           <a:xfrm xmlns:a="http://schemas.openxmlformats.org/drawingml/2006/main">
-            <a:off x="533400" y="2612231"/>
+            <a:off x="533400" y="2972231"/>
             <a:ext cx="2343150" cy="7620"/>
           </a:xfrm>
           <a:prstGeom xmlns:a="http://schemas.openxmlformats.org/drawingml/2006/main" prst="rect">
@@ -1564,7 +1564,7 @@
         </p:nvSpPr>
         <p:spPr>
           <a:xfrm xmlns:a="http://schemas.openxmlformats.org/drawingml/2006/main">
-            <a:off x="485775" y="2071688"/>
+            <a:off x="485775" y="2431688"/>
             <a:ext cx="38100" cy="9525"/>
           </a:xfrm>
           <a:prstGeom xmlns:a="http://schemas.openxmlformats.org/drawingml/2006/main" prst="rect">
@@ -1594,7 +1594,7 @@
         </p:nvSpPr>
         <p:spPr>
           <a:xfrm xmlns:a="http://schemas.openxmlformats.org/drawingml/2006/main">
-            <a:off x="133350" y="1995488"/>
+            <a:off x="133350" y="2355488"/>
             <a:ext cx="323850" cy="180975"/>
           </a:xfrm>
           <a:prstGeom xmlns:a="http://schemas.openxmlformats.org/drawingml/2006/main" prst="rect">
@@ -1651,7 +1651,7 @@
         </p:nvSpPr>
         <p:spPr>
           <a:xfrm xmlns:a="http://schemas.openxmlformats.org/drawingml/2006/main">
-            <a:off x="533400" y="2071688"/>
+            <a:off x="533400" y="2431688"/>
             <a:ext cx="2343150" cy="7620"/>
           </a:xfrm>
           <a:prstGeom xmlns:a="http://schemas.openxmlformats.org/drawingml/2006/main" prst="rect">
@@ -1681,7 +1681,7 @@
         </p:nvSpPr>
         <p:spPr>
           <a:xfrm xmlns:a="http://schemas.openxmlformats.org/drawingml/2006/main">
-            <a:off x="485775" y="1531144"/>
+            <a:off x="485775" y="1891144"/>
             <a:ext cx="38100" cy="9525"/>
           </a:xfrm>
           <a:prstGeom xmlns:a="http://schemas.openxmlformats.org/drawingml/2006/main" prst="rect">
@@ -1711,7 +1711,7 @@
         </p:nvSpPr>
         <p:spPr>
           <a:xfrm xmlns:a="http://schemas.openxmlformats.org/drawingml/2006/main">
-            <a:off x="133350" y="1454944"/>
+            <a:off x="133350" y="1814944"/>
             <a:ext cx="323850" cy="180975"/>
           </a:xfrm>
           <a:prstGeom xmlns:a="http://schemas.openxmlformats.org/drawingml/2006/main" prst="rect">
@@ -1768,7 +1768,7 @@
         </p:nvSpPr>
         <p:spPr>
           <a:xfrm xmlns:a="http://schemas.openxmlformats.org/drawingml/2006/main">
-            <a:off x="533400" y="1531144"/>
+            <a:off x="533400" y="1891144"/>
             <a:ext cx="2343150" cy="7620"/>
           </a:xfrm>
           <a:prstGeom xmlns:a="http://schemas.openxmlformats.org/drawingml/2006/main" prst="rect">
@@ -1798,7 +1798,7 @@
         </p:nvSpPr>
         <p:spPr>
           <a:xfrm xmlns:a="http://schemas.openxmlformats.org/drawingml/2006/main">
-            <a:off x="485775" y="990600"/>
+            <a:off x="485775" y="1350600"/>
             <a:ext cx="38100" cy="9525"/>
           </a:xfrm>
           <a:prstGeom xmlns:a="http://schemas.openxmlformats.org/drawingml/2006/main" prst="rect">
@@ -1828,7 +1828,7 @@
         </p:nvSpPr>
         <p:spPr>
           <a:xfrm xmlns:a="http://schemas.openxmlformats.org/drawingml/2006/main">
-            <a:off x="133350" y="914400"/>
+            <a:off x="133350" y="1274400"/>
             <a:ext cx="323850" cy="180975"/>
           </a:xfrm>
           <a:prstGeom xmlns:a="http://schemas.openxmlformats.org/drawingml/2006/main" prst="rect">
@@ -1885,7 +1885,7 @@
         </p:nvSpPr>
         <p:spPr>
           <a:xfrm xmlns:a="http://schemas.openxmlformats.org/drawingml/2006/main">
-            <a:off x="533400" y="990600"/>
+            <a:off x="533400" y="1350600"/>
             <a:ext cx="2343150" cy="7620"/>
           </a:xfrm>
           <a:prstGeom xmlns:a="http://schemas.openxmlformats.org/drawingml/2006/main" prst="rect">
@@ -1915,7 +1915,7 @@
         </p:nvSpPr>
         <p:spPr>
           <a:xfrm xmlns:a="http://schemas.openxmlformats.org/drawingml/2006/main">
-            <a:off x="447675" y="638175"/>
+            <a:off x="447675" y="998175"/>
             <a:ext cx="2505075" cy="247650"/>
           </a:xfrm>
           <a:prstGeom xmlns:a="http://schemas.openxmlformats.org/drawingml/2006/main" prst="rect">
@@ -1972,7 +1972,7 @@
         </p:nvSpPr>
         <p:spPr>
           <a:xfrm xmlns:a="http://schemas.openxmlformats.org/drawingml/2006/main">
-            <a:off x="542925" y="3219450"/>
+            <a:off x="542925" y="3579450"/>
             <a:ext cx="552450" cy="209550"/>
           </a:xfrm>
           <a:prstGeom xmlns:a="http://schemas.openxmlformats.org/drawingml/2006/main" prst="rect">
@@ -2029,7 +2029,7 @@
         </p:nvSpPr>
         <p:spPr>
           <a:xfrm xmlns:a="http://schemas.openxmlformats.org/drawingml/2006/main">
-            <a:off x="1352550" y="3219450"/>
+            <a:off x="1352550" y="3579450"/>
             <a:ext cx="552450" cy="209550"/>
           </a:xfrm>
           <a:prstGeom xmlns:a="http://schemas.openxmlformats.org/drawingml/2006/main" prst="rect">
@@ -2086,7 +2086,7 @@
         </p:nvSpPr>
         <p:spPr>
           <a:xfrm xmlns:a="http://schemas.openxmlformats.org/drawingml/2006/main">
-            <a:off x="2162175" y="3219450"/>
+            <a:off x="2162175" y="3579450"/>
             <a:ext cx="552450" cy="209550"/>
           </a:xfrm>
           <a:prstGeom xmlns:a="http://schemas.openxmlformats.org/drawingml/2006/main" prst="rect">
@@ -2143,7 +2143,7 @@
         </p:nvSpPr>
         <p:spPr>
           <a:xfrm xmlns:a="http://schemas.openxmlformats.org/drawingml/2006/main">
-            <a:off x="628650" y="2821425"/>
+            <a:off x="628650" y="3181425"/>
             <a:ext cx="381000" cy="331350"/>
           </a:xfrm>
           <a:prstGeom xmlns:a="http://schemas.openxmlformats.org/drawingml/2006/main" prst="rect">
@@ -2173,7 +2173,7 @@
         </p:nvSpPr>
         <p:spPr>
           <a:xfrm xmlns:a="http://schemas.openxmlformats.org/drawingml/2006/main">
-            <a:off x="609600" y="2901375"/>
+            <a:off x="609600" y="3261375"/>
             <a:ext cx="419100" cy="190500"/>
           </a:xfrm>
           <a:prstGeom xmlns:a="http://schemas.openxmlformats.org/drawingml/2006/main" prst="rect">
@@ -2230,7 +2230,7 @@
         </p:nvSpPr>
         <p:spPr>
           <a:xfrm xmlns:a="http://schemas.openxmlformats.org/drawingml/2006/main">
-            <a:off x="628650" y="2767981"/>
+            <a:off x="628650" y="3127981"/>
             <a:ext cx="381000" cy="53444"/>
           </a:xfrm>
           <a:prstGeom xmlns:a="http://schemas.openxmlformats.org/drawingml/2006/main" prst="rect">
@@ -2260,7 +2260,7 @@
         </p:nvSpPr>
         <p:spPr>
           <a:xfrm xmlns:a="http://schemas.openxmlformats.org/drawingml/2006/main">
-            <a:off x="628650" y="990600"/>
+            <a:off x="628650" y="1350600"/>
             <a:ext cx="381000" cy="1777381"/>
           </a:xfrm>
           <a:prstGeom xmlns:a="http://schemas.openxmlformats.org/drawingml/2006/main" prst="rect">
@@ -2290,7 +2290,7 @@
         </p:nvSpPr>
         <p:spPr>
           <a:xfrm xmlns:a="http://schemas.openxmlformats.org/drawingml/2006/main">
-            <a:off x="609600" y="1793566"/>
+            <a:off x="609600" y="2153566"/>
             <a:ext cx="419100" cy="190500"/>
           </a:xfrm>
           <a:prstGeom xmlns:a="http://schemas.openxmlformats.org/drawingml/2006/main" prst="rect">
@@ -2347,7 +2347,7 @@
         </p:nvSpPr>
         <p:spPr>
           <a:xfrm xmlns:a="http://schemas.openxmlformats.org/drawingml/2006/main">
-            <a:off x="628650" y="990600"/>
+            <a:off x="628650" y="1350600"/>
             <a:ext cx="381000" cy="0"/>
           </a:xfrm>
           <a:prstGeom xmlns:a="http://schemas.openxmlformats.org/drawingml/2006/main" prst="rect">
@@ -2377,7 +2377,7 @@
         </p:nvSpPr>
         <p:spPr>
           <a:xfrm xmlns:a="http://schemas.openxmlformats.org/drawingml/2006/main">
-            <a:off x="1438275" y="2505955"/>
+            <a:off x="1438275" y="2865955"/>
             <a:ext cx="381000" cy="646820"/>
           </a:xfrm>
           <a:prstGeom xmlns:a="http://schemas.openxmlformats.org/drawingml/2006/main" prst="rect">
@@ -2407,7 +2407,7 @@
         </p:nvSpPr>
         <p:spPr>
           <a:xfrm xmlns:a="http://schemas.openxmlformats.org/drawingml/2006/main">
-            <a:off x="1419225" y="2743640"/>
+            <a:off x="1419225" y="3103640"/>
             <a:ext cx="419100" cy="190500"/>
           </a:xfrm>
           <a:prstGeom xmlns:a="http://schemas.openxmlformats.org/drawingml/2006/main" prst="rect">
@@ -2464,7 +2464,7 @@
         </p:nvSpPr>
         <p:spPr>
           <a:xfrm xmlns:a="http://schemas.openxmlformats.org/drawingml/2006/main">
-            <a:off x="1438275" y="2332492"/>
+            <a:off x="1438275" y="2692492"/>
             <a:ext cx="381000" cy="173463"/>
           </a:xfrm>
           <a:prstGeom xmlns:a="http://schemas.openxmlformats.org/drawingml/2006/main" prst="rect">
@@ -2494,7 +2494,7 @@
         </p:nvSpPr>
         <p:spPr>
           <a:xfrm xmlns:a="http://schemas.openxmlformats.org/drawingml/2006/main">
-            <a:off x="1438275" y="990600"/>
+            <a:off x="1438275" y="1350600"/>
             <a:ext cx="381000" cy="1341892"/>
           </a:xfrm>
           <a:prstGeom xmlns:a="http://schemas.openxmlformats.org/drawingml/2006/main" prst="rect">
@@ -2524,7 +2524,7 @@
         </p:nvSpPr>
         <p:spPr>
           <a:xfrm xmlns:a="http://schemas.openxmlformats.org/drawingml/2006/main">
-            <a:off x="1419225" y="1575821"/>
+            <a:off x="1419225" y="1935821"/>
             <a:ext cx="419100" cy="190500"/>
           </a:xfrm>
           <a:prstGeom xmlns:a="http://schemas.openxmlformats.org/drawingml/2006/main" prst="rect">
@@ -2581,7 +2581,7 @@
         </p:nvSpPr>
         <p:spPr>
           <a:xfrm xmlns:a="http://schemas.openxmlformats.org/drawingml/2006/main">
-            <a:off x="1438275" y="990600"/>
+            <a:off x="1438275" y="1350600"/>
             <a:ext cx="381000" cy="0"/>
           </a:xfrm>
           <a:prstGeom xmlns:a="http://schemas.openxmlformats.org/drawingml/2006/main" prst="rect">
@@ -2611,7 +2611,7 @@
         </p:nvSpPr>
         <p:spPr>
           <a:xfrm xmlns:a="http://schemas.openxmlformats.org/drawingml/2006/main">
-            <a:off x="2247900" y="2246066"/>
+            <a:off x="2247900" y="2606066"/>
             <a:ext cx="381000" cy="906709"/>
           </a:xfrm>
           <a:prstGeom xmlns:a="http://schemas.openxmlformats.org/drawingml/2006/main" prst="rect">
@@ -2641,7 +2641,7 @@
         </p:nvSpPr>
         <p:spPr>
           <a:xfrm xmlns:a="http://schemas.openxmlformats.org/drawingml/2006/main">
-            <a:off x="2228850" y="2613696"/>
+            <a:off x="2228850" y="2973696"/>
             <a:ext cx="419100" cy="190500"/>
           </a:xfrm>
           <a:prstGeom xmlns:a="http://schemas.openxmlformats.org/drawingml/2006/main" prst="rect">
@@ -2698,7 +2698,7 @@
         </p:nvSpPr>
         <p:spPr>
           <a:xfrm xmlns:a="http://schemas.openxmlformats.org/drawingml/2006/main">
-            <a:off x="2247900" y="1952279"/>
+            <a:off x="2247900" y="2312279"/>
             <a:ext cx="381000" cy="293787"/>
           </a:xfrm>
           <a:prstGeom xmlns:a="http://schemas.openxmlformats.org/drawingml/2006/main" prst="rect">
@@ -2728,7 +2728,7 @@
         </p:nvSpPr>
         <p:spPr>
           <a:xfrm xmlns:a="http://schemas.openxmlformats.org/drawingml/2006/main">
-            <a:off x="2228850" y="2013448"/>
+            <a:off x="2228850" y="2373448"/>
             <a:ext cx="419100" cy="190500"/>
           </a:xfrm>
           <a:prstGeom xmlns:a="http://schemas.openxmlformats.org/drawingml/2006/main" prst="rect">
@@ -2785,7 +2785,7 @@
         </p:nvSpPr>
         <p:spPr>
           <a:xfrm xmlns:a="http://schemas.openxmlformats.org/drawingml/2006/main">
-            <a:off x="2247900" y="994570"/>
+            <a:off x="2247900" y="1354570"/>
             <a:ext cx="381000" cy="957709"/>
           </a:xfrm>
           <a:prstGeom xmlns:a="http://schemas.openxmlformats.org/drawingml/2006/main" prst="rect">
@@ -2815,7 +2815,7 @@
         </p:nvSpPr>
         <p:spPr>
           <a:xfrm xmlns:a="http://schemas.openxmlformats.org/drawingml/2006/main">
-            <a:off x="2228850" y="1387700"/>
+            <a:off x="2228850" y="1747700"/>
             <a:ext cx="419100" cy="190500"/>
           </a:xfrm>
           <a:prstGeom xmlns:a="http://schemas.openxmlformats.org/drawingml/2006/main" prst="rect">
@@ -2872,7 +2872,7 @@
         </p:nvSpPr>
         <p:spPr>
           <a:xfrm xmlns:a="http://schemas.openxmlformats.org/drawingml/2006/main">
-            <a:off x="2247900" y="990600"/>
+            <a:off x="2247900" y="1350600"/>
             <a:ext cx="381000" cy="3970"/>
           </a:xfrm>
           <a:prstGeom xmlns:a="http://schemas.openxmlformats.org/drawingml/2006/main" prst="rect">
@@ -2902,7 +2902,7 @@
         </p:nvSpPr>
         <p:spPr>
           <a:xfrm xmlns:a="http://schemas.openxmlformats.org/drawingml/2006/main">
-            <a:off x="3409950" y="3152775"/>
+            <a:off x="3409950" y="3512775"/>
             <a:ext cx="2333625" cy="9525"/>
           </a:xfrm>
           <a:prstGeom xmlns:a="http://schemas.openxmlformats.org/drawingml/2006/main" prst="rect">
@@ -2932,7 +2932,7 @@
         </p:nvSpPr>
         <p:spPr>
           <a:xfrm xmlns:a="http://schemas.openxmlformats.org/drawingml/2006/main">
-            <a:off x="3409950" y="990600"/>
+            <a:off x="3409950" y="1350600"/>
             <a:ext cx="9525" cy="2162175"/>
           </a:xfrm>
           <a:prstGeom xmlns:a="http://schemas.openxmlformats.org/drawingml/2006/main" prst="rect">
@@ -2962,7 +2962,7 @@
         </p:nvSpPr>
         <p:spPr>
           <a:xfrm xmlns:a="http://schemas.openxmlformats.org/drawingml/2006/main">
-            <a:off x="3371850" y="3152775"/>
+            <a:off x="3371850" y="3512775"/>
             <a:ext cx="38100" cy="9525"/>
           </a:xfrm>
           <a:prstGeom xmlns:a="http://schemas.openxmlformats.org/drawingml/2006/main" prst="rect">
@@ -2992,7 +2992,7 @@
         </p:nvSpPr>
         <p:spPr>
           <a:xfrm xmlns:a="http://schemas.openxmlformats.org/drawingml/2006/main">
-            <a:off x="3019425" y="3076575"/>
+            <a:off x="3019425" y="3436575"/>
             <a:ext cx="323850" cy="180975"/>
           </a:xfrm>
           <a:prstGeom xmlns:a="http://schemas.openxmlformats.org/drawingml/2006/main" prst="rect">
@@ -3049,7 +3049,7 @@
         </p:nvSpPr>
         <p:spPr>
           <a:xfrm xmlns:a="http://schemas.openxmlformats.org/drawingml/2006/main">
-            <a:off x="3371850" y="2612231"/>
+            <a:off x="3371850" y="2972231"/>
             <a:ext cx="38100" cy="9525"/>
           </a:xfrm>
           <a:prstGeom xmlns:a="http://schemas.openxmlformats.org/drawingml/2006/main" prst="rect">
@@ -3079,7 +3079,7 @@
         </p:nvSpPr>
         <p:spPr>
           <a:xfrm xmlns:a="http://schemas.openxmlformats.org/drawingml/2006/main">
-            <a:off x="3019425" y="2536031"/>
+            <a:off x="3019425" y="2896031"/>
             <a:ext cx="323850" cy="180975"/>
           </a:xfrm>
           <a:prstGeom xmlns:a="http://schemas.openxmlformats.org/drawingml/2006/main" prst="rect">
@@ -3136,7 +3136,7 @@
         </p:nvSpPr>
         <p:spPr>
           <a:xfrm xmlns:a="http://schemas.openxmlformats.org/drawingml/2006/main">
-            <a:off x="3419475" y="2612231"/>
+            <a:off x="3419475" y="2972231"/>
             <a:ext cx="2324100" cy="7620"/>
           </a:xfrm>
           <a:prstGeom xmlns:a="http://schemas.openxmlformats.org/drawingml/2006/main" prst="rect">
@@ -3166,7 +3166,7 @@
         </p:nvSpPr>
         <p:spPr>
           <a:xfrm xmlns:a="http://schemas.openxmlformats.org/drawingml/2006/main">
-            <a:off x="3371850" y="2071688"/>
+            <a:off x="3371850" y="2431688"/>
             <a:ext cx="38100" cy="9525"/>
           </a:xfrm>
           <a:prstGeom xmlns:a="http://schemas.openxmlformats.org/drawingml/2006/main" prst="rect">
@@ -3196,7 +3196,7 @@
         </p:nvSpPr>
         <p:spPr>
           <a:xfrm xmlns:a="http://schemas.openxmlformats.org/drawingml/2006/main">
-            <a:off x="3019425" y="1995488"/>
+            <a:off x="3019425" y="2355488"/>
             <a:ext cx="323850" cy="180975"/>
           </a:xfrm>
           <a:prstGeom xmlns:a="http://schemas.openxmlformats.org/drawingml/2006/main" prst="rect">
@@ -3253,7 +3253,7 @@
         </p:nvSpPr>
         <p:spPr>
           <a:xfrm xmlns:a="http://schemas.openxmlformats.org/drawingml/2006/main">
-            <a:off x="3419475" y="2071688"/>
+            <a:off x="3419475" y="2431688"/>
             <a:ext cx="2324100" cy="7620"/>
           </a:xfrm>
           <a:prstGeom xmlns:a="http://schemas.openxmlformats.org/drawingml/2006/main" prst="rect">
@@ -3283,7 +3283,7 @@
         </p:nvSpPr>
         <p:spPr>
           <a:xfrm xmlns:a="http://schemas.openxmlformats.org/drawingml/2006/main">
-            <a:off x="3371850" y="1531144"/>
+            <a:off x="3371850" y="1891144"/>
             <a:ext cx="38100" cy="9525"/>
           </a:xfrm>
           <a:prstGeom xmlns:a="http://schemas.openxmlformats.org/drawingml/2006/main" prst="rect">
@@ -3313,7 +3313,7 @@
         </p:nvSpPr>
         <p:spPr>
           <a:xfrm xmlns:a="http://schemas.openxmlformats.org/drawingml/2006/main">
-            <a:off x="3019425" y="1454944"/>
+            <a:off x="3019425" y="1814944"/>
             <a:ext cx="323850" cy="180975"/>
           </a:xfrm>
           <a:prstGeom xmlns:a="http://schemas.openxmlformats.org/drawingml/2006/main" prst="rect">
@@ -3370,7 +3370,7 @@
         </p:nvSpPr>
         <p:spPr>
           <a:xfrm xmlns:a="http://schemas.openxmlformats.org/drawingml/2006/main">
-            <a:off x="3419475" y="1531144"/>
+            <a:off x="3419475" y="1891144"/>
             <a:ext cx="2324100" cy="7620"/>
           </a:xfrm>
           <a:prstGeom xmlns:a="http://schemas.openxmlformats.org/drawingml/2006/main" prst="rect">
@@ -3400,7 +3400,7 @@
         </p:nvSpPr>
         <p:spPr>
           <a:xfrm xmlns:a="http://schemas.openxmlformats.org/drawingml/2006/main">
-            <a:off x="3371850" y="990600"/>
+            <a:off x="3371850" y="1350600"/>
             <a:ext cx="38100" cy="9525"/>
           </a:xfrm>
           <a:prstGeom xmlns:a="http://schemas.openxmlformats.org/drawingml/2006/main" prst="rect">
@@ -3430,7 +3430,7 @@
         </p:nvSpPr>
         <p:spPr>
           <a:xfrm xmlns:a="http://schemas.openxmlformats.org/drawingml/2006/main">
-            <a:off x="3019425" y="914400"/>
+            <a:off x="3019425" y="1274400"/>
             <a:ext cx="323850" cy="180975"/>
           </a:xfrm>
           <a:prstGeom xmlns:a="http://schemas.openxmlformats.org/drawingml/2006/main" prst="rect">
@@ -3487,7 +3487,7 @@
         </p:nvSpPr>
         <p:spPr>
           <a:xfrm xmlns:a="http://schemas.openxmlformats.org/drawingml/2006/main">
-            <a:off x="3419475" y="990600"/>
+            <a:off x="3419475" y="1350600"/>
             <a:ext cx="2324100" cy="7620"/>
           </a:xfrm>
           <a:prstGeom xmlns:a="http://schemas.openxmlformats.org/drawingml/2006/main" prst="rect">
@@ -3517,7 +3517,7 @@
         </p:nvSpPr>
         <p:spPr>
           <a:xfrm xmlns:a="http://schemas.openxmlformats.org/drawingml/2006/main">
-            <a:off x="3333750" y="638175"/>
+            <a:off x="3333750" y="998175"/>
             <a:ext cx="2486025" cy="247650"/>
           </a:xfrm>
           <a:prstGeom xmlns:a="http://schemas.openxmlformats.org/drawingml/2006/main" prst="rect">
@@ -3574,7 +3574,7 @@
         </p:nvSpPr>
         <p:spPr>
           <a:xfrm xmlns:a="http://schemas.openxmlformats.org/drawingml/2006/main">
-            <a:off x="3362325" y="3219450"/>
+            <a:off x="3362325" y="3579450"/>
             <a:ext cx="552450" cy="209550"/>
           </a:xfrm>
           <a:prstGeom xmlns:a="http://schemas.openxmlformats.org/drawingml/2006/main" prst="rect">
@@ -3631,7 +3631,7 @@
         </p:nvSpPr>
         <p:spPr>
           <a:xfrm xmlns:a="http://schemas.openxmlformats.org/drawingml/2006/main">
-            <a:off x="4171950" y="3219450"/>
+            <a:off x="4171950" y="3579450"/>
             <a:ext cx="552450" cy="209550"/>
           </a:xfrm>
           <a:prstGeom xmlns:a="http://schemas.openxmlformats.org/drawingml/2006/main" prst="rect">
@@ -3688,7 +3688,7 @@
         </p:nvSpPr>
         <p:spPr>
           <a:xfrm xmlns:a="http://schemas.openxmlformats.org/drawingml/2006/main">
-            <a:off x="4981575" y="3219450"/>
+            <a:off x="4981575" y="3579450"/>
             <a:ext cx="552450" cy="209550"/>
           </a:xfrm>
           <a:prstGeom xmlns:a="http://schemas.openxmlformats.org/drawingml/2006/main" prst="rect">
@@ -3745,7 +3745,7 @@
         </p:nvSpPr>
         <p:spPr>
           <a:xfrm xmlns:a="http://schemas.openxmlformats.org/drawingml/2006/main">
-            <a:off x="3638550" y="2717647"/>
+            <a:off x="3638550" y="3077647"/>
             <a:ext cx="11430" cy="39699"/>
           </a:xfrm>
           <a:prstGeom xmlns:a="http://schemas.openxmlformats.org/drawingml/2006/main" prst="rect">
@@ -3775,7 +3775,7 @@
         </p:nvSpPr>
         <p:spPr>
           <a:xfrm xmlns:a="http://schemas.openxmlformats.org/drawingml/2006/main">
-            <a:off x="3590925" y="2717647"/>
+            <a:off x="3590925" y="3077647"/>
             <a:ext cx="95250" cy="11430"/>
           </a:xfrm>
           <a:prstGeom xmlns:a="http://schemas.openxmlformats.org/drawingml/2006/main" prst="rect">
@@ -3805,7 +3805,7 @@
         </p:nvSpPr>
         <p:spPr>
           <a:xfrm xmlns:a="http://schemas.openxmlformats.org/drawingml/2006/main">
-            <a:off x="3590925" y="2757347"/>
+            <a:off x="3590925" y="3117347"/>
             <a:ext cx="95250" cy="11430"/>
           </a:xfrm>
           <a:prstGeom xmlns:a="http://schemas.openxmlformats.org/drawingml/2006/main" prst="rect">
@@ -3835,7 +3835,7 @@
         </p:nvSpPr>
         <p:spPr>
           <a:xfrm xmlns:a="http://schemas.openxmlformats.org/drawingml/2006/main">
-            <a:off x="3600450" y="2697647"/>
+            <a:off x="3600450" y="3057647"/>
             <a:ext cx="76200" cy="76200"/>
           </a:xfrm>
           <a:prstGeom xmlns:a="http://schemas.openxmlformats.org/drawingml/2006/main" prst="ellipse">
@@ -3865,7 +3865,7 @@
         </p:nvSpPr>
         <p:spPr>
           <a:xfrm xmlns:a="http://schemas.openxmlformats.org/drawingml/2006/main">
-            <a:off x="3409950" y="2469997"/>
+            <a:off x="3409950" y="2829997"/>
             <a:ext cx="457200" cy="209550"/>
           </a:xfrm>
           <a:prstGeom xmlns:a="http://schemas.openxmlformats.org/drawingml/2006/main" prst="rect">
@@ -3922,7 +3922,7 @@
         </p:nvSpPr>
         <p:spPr>
           <a:xfrm xmlns:a="http://schemas.openxmlformats.org/drawingml/2006/main">
-            <a:off x="4448175" y="1886983"/>
+            <a:off x="4448175" y="2246983"/>
             <a:ext cx="11430" cy="200636"/>
           </a:xfrm>
           <a:prstGeom xmlns:a="http://schemas.openxmlformats.org/drawingml/2006/main" prst="rect">
@@ -3952,7 +3952,7 @@
         </p:nvSpPr>
         <p:spPr>
           <a:xfrm xmlns:a="http://schemas.openxmlformats.org/drawingml/2006/main">
-            <a:off x="4400550" y="1886983"/>
+            <a:off x="4400550" y="2246983"/>
             <a:ext cx="95250" cy="11430"/>
           </a:xfrm>
           <a:prstGeom xmlns:a="http://schemas.openxmlformats.org/drawingml/2006/main" prst="rect">
@@ -3982,7 +3982,7 @@
         </p:nvSpPr>
         <p:spPr>
           <a:xfrm xmlns:a="http://schemas.openxmlformats.org/drawingml/2006/main">
-            <a:off x="4400550" y="2087619"/>
+            <a:off x="4400550" y="2447619"/>
             <a:ext cx="95250" cy="11430"/>
           </a:xfrm>
           <a:prstGeom xmlns:a="http://schemas.openxmlformats.org/drawingml/2006/main" prst="rect">
@@ -4012,7 +4012,7 @@
         </p:nvSpPr>
         <p:spPr>
           <a:xfrm xmlns:a="http://schemas.openxmlformats.org/drawingml/2006/main">
-            <a:off x="4410075" y="1943385"/>
+            <a:off x="4410075" y="2303385"/>
             <a:ext cx="76200" cy="76200"/>
           </a:xfrm>
           <a:prstGeom xmlns:a="http://schemas.openxmlformats.org/drawingml/2006/main" prst="ellipse">
@@ -4042,7 +4042,7 @@
         </p:nvSpPr>
         <p:spPr>
           <a:xfrm xmlns:a="http://schemas.openxmlformats.org/drawingml/2006/main">
-            <a:off x="4219575" y="1639333"/>
+            <a:off x="4219575" y="1999333"/>
             <a:ext cx="457200" cy="209550"/>
           </a:xfrm>
           <a:prstGeom xmlns:a="http://schemas.openxmlformats.org/drawingml/2006/main" prst="rect">
@@ -4099,7 +4099,7 @@
         </p:nvSpPr>
         <p:spPr>
           <a:xfrm xmlns:a="http://schemas.openxmlformats.org/drawingml/2006/main">
-            <a:off x="5257800" y="1264848"/>
+            <a:off x="5257800" y="1624848"/>
             <a:ext cx="11430" cy="361677"/>
           </a:xfrm>
           <a:prstGeom xmlns:a="http://schemas.openxmlformats.org/drawingml/2006/main" prst="rect">
@@ -4129,7 +4129,7 @@
         </p:nvSpPr>
         <p:spPr>
           <a:xfrm xmlns:a="http://schemas.openxmlformats.org/drawingml/2006/main">
-            <a:off x="5210175" y="1264848"/>
+            <a:off x="5210175" y="1624848"/>
             <a:ext cx="95250" cy="11430"/>
           </a:xfrm>
           <a:prstGeom xmlns:a="http://schemas.openxmlformats.org/drawingml/2006/main" prst="rect">
@@ -4159,7 +4159,7 @@
         </p:nvSpPr>
         <p:spPr>
           <a:xfrm xmlns:a="http://schemas.openxmlformats.org/drawingml/2006/main">
-            <a:off x="5210175" y="1626525"/>
+            <a:off x="5210175" y="1986525"/>
             <a:ext cx="95250" cy="11430"/>
           </a:xfrm>
           <a:prstGeom xmlns:a="http://schemas.openxmlformats.org/drawingml/2006/main" prst="rect">
@@ -4189,7 +4189,7 @@
         </p:nvSpPr>
         <p:spPr>
           <a:xfrm xmlns:a="http://schemas.openxmlformats.org/drawingml/2006/main">
-            <a:off x="5219700" y="1399123"/>
+            <a:off x="5219700" y="1759123"/>
             <a:ext cx="76200" cy="76200"/>
           </a:xfrm>
           <a:prstGeom xmlns:a="http://schemas.openxmlformats.org/drawingml/2006/main" prst="ellipse">
@@ -4219,7 +4219,7 @@
         </p:nvSpPr>
         <p:spPr>
           <a:xfrm xmlns:a="http://schemas.openxmlformats.org/drawingml/2006/main">
-            <a:off x="5029200" y="1017198"/>
+            <a:off x="5029200" y="1377198"/>
             <a:ext cx="457200" cy="209550"/>
           </a:xfrm>
           <a:prstGeom xmlns:a="http://schemas.openxmlformats.org/drawingml/2006/main" prst="rect">
@@ -4276,7 +4276,7 @@
         </p:nvSpPr>
         <p:spPr>
           <a:xfrm xmlns:a="http://schemas.openxmlformats.org/drawingml/2006/main">
-            <a:off x="971550" y="3486150"/>
+            <a:off x="971550" y="3846150"/>
             <a:ext cx="4048125" cy="219075"/>
           </a:xfrm>
           <a:prstGeom xmlns:a="http://schemas.openxmlformats.org/drawingml/2006/main" prst="rect">
@@ -4333,7 +4333,7 @@
         </p:nvSpPr>
         <p:spPr>
           <a:xfrm xmlns:a="http://schemas.openxmlformats.org/drawingml/2006/main">
-            <a:off x="409575" y="3867150"/>
+            <a:off x="409575" y="4227150"/>
             <a:ext cx="104775" cy="104775"/>
           </a:xfrm>
           <a:prstGeom xmlns:a="http://schemas.openxmlformats.org/drawingml/2006/main" prst="rect">
@@ -4363,7 +4363,7 @@
         </p:nvSpPr>
         <p:spPr>
           <a:xfrm xmlns:a="http://schemas.openxmlformats.org/drawingml/2006/main">
-            <a:off x="571500" y="3829050"/>
+            <a:off x="571500" y="4189050"/>
             <a:ext cx="2476500" cy="209550"/>
           </a:xfrm>
           <a:prstGeom xmlns:a="http://schemas.openxmlformats.org/drawingml/2006/main" prst="rect">
@@ -4420,7 +4420,7 @@
         </p:nvSpPr>
         <p:spPr>
           <a:xfrm xmlns:a="http://schemas.openxmlformats.org/drawingml/2006/main">
-            <a:off x="409575" y="4086225"/>
+            <a:off x="409575" y="4446225"/>
             <a:ext cx="104775" cy="104775"/>
           </a:xfrm>
           <a:prstGeom xmlns:a="http://schemas.openxmlformats.org/drawingml/2006/main" prst="rect">
@@ -4450,7 +4450,7 @@
         </p:nvSpPr>
         <p:spPr>
           <a:xfrm xmlns:a="http://schemas.openxmlformats.org/drawingml/2006/main">
-            <a:off x="571500" y="4048125"/>
+            <a:off x="571500" y="4408125"/>
             <a:ext cx="2476500" cy="209550"/>
           </a:xfrm>
           <a:prstGeom xmlns:a="http://schemas.openxmlformats.org/drawingml/2006/main" prst="rect">
@@ -4507,7 +4507,7 @@
         </p:nvSpPr>
         <p:spPr>
           <a:xfrm xmlns:a="http://schemas.openxmlformats.org/drawingml/2006/main">
-            <a:off x="409575" y="4305300"/>
+            <a:off x="409575" y="4665300"/>
             <a:ext cx="104775" cy="104775"/>
           </a:xfrm>
           <a:prstGeom xmlns:a="http://schemas.openxmlformats.org/drawingml/2006/main" prst="rect">
@@ -4537,7 +4537,7 @@
         </p:nvSpPr>
         <p:spPr>
           <a:xfrm xmlns:a="http://schemas.openxmlformats.org/drawingml/2006/main">
-            <a:off x="571500" y="4267200"/>
+            <a:off x="571500" y="4627200"/>
             <a:ext cx="2476500" cy="209550"/>
           </a:xfrm>
           <a:prstGeom xmlns:a="http://schemas.openxmlformats.org/drawingml/2006/main" prst="rect">
@@ -4594,7 +4594,7 @@
         </p:nvSpPr>
         <p:spPr>
           <a:xfrm xmlns:a="http://schemas.openxmlformats.org/drawingml/2006/main">
-            <a:off x="409575" y="4524375"/>
+            <a:off x="409575" y="4884375"/>
             <a:ext cx="104775" cy="104775"/>
           </a:xfrm>
           <a:prstGeom xmlns:a="http://schemas.openxmlformats.org/drawingml/2006/main" prst="rect">
@@ -4624,7 +4624,7 @@
         </p:nvSpPr>
         <p:spPr>
           <a:xfrm xmlns:a="http://schemas.openxmlformats.org/drawingml/2006/main">
-            <a:off x="571500" y="4486275"/>
+            <a:off x="571500" y="4846275"/>
             <a:ext cx="2476500" cy="209550"/>
           </a:xfrm>
           <a:prstGeom xmlns:a="http://schemas.openxmlformats.org/drawingml/2006/main" prst="rect">
@@ -4681,7 +4681,7 @@
         </p:nvSpPr>
         <p:spPr>
           <a:xfrm xmlns:a="http://schemas.openxmlformats.org/drawingml/2006/main">
-            <a:off x="3209925" y="3971925"/>
+            <a:off x="3209925" y="4331925"/>
             <a:ext cx="2562225" cy="523875"/>
           </a:xfrm>
           <a:prstGeom xmlns:a="http://schemas.openxmlformats.org/drawingml/2006/main" prst="rect">
